--- a/from-prompt-to-practice.pptx
+++ b/from-prompt-to-practice.pptx
@@ -2794,7 +2794,7 @@
                   <a:schemeClr val="accent1"/>
                 </a:solidFill>
               </a:rPr>
-              <a:t>AI FOR HEALTHCARE · TBILISI, GEORGIA · OCTOBER 2026</a:t>
+              <a:t>AIMCARE 2026 · TBILISI, GEORGIA · OCTOBER 2026</a:t>
             </a:r>
             <a:endParaRPr lang="en-US" sz="1200" dirty="0"/>
           </a:p>
